--- a/pipeline/snapshots/missions/m_1776946722_a288bd54/implementation_plan.pptx
+++ b/pipeline/snapshots/missions/m_1776946722_a288bd54/implementation_plan.pptx
@@ -3311,7 +3311,7 @@
                 </a:solidFill>
                 <a:latin typeface="Calibri"/>
               </a:rPr>
-              <a:t>Generated 2026-04-23T13:44:01 UTC</a:t>
+              <a:t>Generated 2026-04-23T14:47:57 UTC</a:t>
             </a:r>
           </a:p>
         </p:txBody>
@@ -5955,7 +5955,7 @@
                 </a:solidFill>
                 <a:latin typeface="Calibri"/>
               </a:rPr>
-              <a:t>Mission m_1776946722_a288bd54  ·  refreshed 2026-04-23T13:44:02 UTC  ·  progress 0%</a:t>
+              <a:t>Mission m_1776946722_a288bd54  ·  refreshed 2026-04-23T14:47:57 UTC  ·  progress 0%</a:t>
             </a:r>
           </a:p>
         </p:txBody>

--- a/pipeline/snapshots/missions/m_1776946722_a288bd54/implementation_plan.pptx
+++ b/pipeline/snapshots/missions/m_1776946722_a288bd54/implementation_plan.pptx
@@ -3311,7 +3311,7 @@
                 </a:solidFill>
                 <a:latin typeface="Calibri"/>
               </a:rPr>
-              <a:t>Generated 2026-04-23T14:47:57 UTC</a:t>
+              <a:t>Generated 2026-04-23T15:51:54 UTC</a:t>
             </a:r>
           </a:p>
         </p:txBody>
@@ -5955,7 +5955,7 @@
                 </a:solidFill>
                 <a:latin typeface="Calibri"/>
               </a:rPr>
-              <a:t>Mission m_1776946722_a288bd54  ·  refreshed 2026-04-23T14:47:57 UTC  ·  progress 0%</a:t>
+              <a:t>Mission m_1776946722_a288bd54  ·  refreshed 2026-04-23T15:51:54 UTC  ·  progress 0%</a:t>
             </a:r>
           </a:p>
         </p:txBody>

--- a/pipeline/snapshots/missions/m_1776946722_a288bd54/implementation_plan.pptx
+++ b/pipeline/snapshots/missions/m_1776946722_a288bd54/implementation_plan.pptx
@@ -3311,7 +3311,7 @@
                 </a:solidFill>
                 <a:latin typeface="Calibri"/>
               </a:rPr>
-              <a:t>Generated 2026-04-23T15:51:54 UTC</a:t>
+              <a:t>Generated 2026-04-23T16:55:21 UTC</a:t>
             </a:r>
           </a:p>
         </p:txBody>
@@ -5955,7 +5955,7 @@
                 </a:solidFill>
                 <a:latin typeface="Calibri"/>
               </a:rPr>
-              <a:t>Mission m_1776946722_a288bd54  ·  refreshed 2026-04-23T15:51:54 UTC  ·  progress 0%</a:t>
+              <a:t>Mission m_1776946722_a288bd54  ·  refreshed 2026-04-23T16:55:21 UTC  ·  progress 0%</a:t>
             </a:r>
           </a:p>
         </p:txBody>
